--- a/assets/powerpoints/module-achat/B2-ou-mettre-l-adjectif.pptx
+++ b/assets/powerpoints/module-achat/B2-ou-mettre-l-adjectif.pptx
@@ -8861,7 +8861,79 @@
                 </a:solidFill>
                 <a:latin typeface="Verdana"/>
               </a:rPr>
-              <a:t>un appareil silencieu&lt;b&gt;x&lt;/b&gt; · une laveuse silencieu&lt;b&gt;se&lt;/b&gt; · des modèles récent&lt;b&gt;s&lt;/b&gt; · des laveuses silencieu&lt;b&gt;ses&lt;/b&gt;. Au féminin, la fin du mot change souvent — et ça s'entend.</a:t>
+              <a:t>un appareil silencieu</a:t>
+            </a:r>
+            <a:r>
+              <a:rPr sz="2000" b="1" i="0">
+                <a:solidFill>
+                  <a:srgbClr val="4B4F52"/>
+                </a:solidFill>
+                <a:latin typeface="Verdana"/>
+              </a:rPr>
+              <a:t>x</a:t>
+            </a:r>
+            <a:r>
+              <a:rPr sz="2000" b="0" i="0">
+                <a:solidFill>
+                  <a:srgbClr val="4B4F52"/>
+                </a:solidFill>
+                <a:latin typeface="Verdana"/>
+              </a:rPr>
+              <a:t> · une laveuse silencieu</a:t>
+            </a:r>
+            <a:r>
+              <a:rPr sz="2000" b="1" i="0">
+                <a:solidFill>
+                  <a:srgbClr val="4B4F52"/>
+                </a:solidFill>
+                <a:latin typeface="Verdana"/>
+              </a:rPr>
+              <a:t>se</a:t>
+            </a:r>
+            <a:r>
+              <a:rPr sz="2000" b="0" i="0">
+                <a:solidFill>
+                  <a:srgbClr val="4B4F52"/>
+                </a:solidFill>
+                <a:latin typeface="Verdana"/>
+              </a:rPr>
+              <a:t> · des modèles récent</a:t>
+            </a:r>
+            <a:r>
+              <a:rPr sz="2000" b="1" i="0">
+                <a:solidFill>
+                  <a:srgbClr val="4B4F52"/>
+                </a:solidFill>
+                <a:latin typeface="Verdana"/>
+              </a:rPr>
+              <a:t>s</a:t>
+            </a:r>
+            <a:r>
+              <a:rPr sz="2000" b="0" i="0">
+                <a:solidFill>
+                  <a:srgbClr val="4B4F52"/>
+                </a:solidFill>
+                <a:latin typeface="Verdana"/>
+              </a:rPr>
+              <a:t> · des laveuses silencieu</a:t>
+            </a:r>
+            <a:r>
+              <a:rPr sz="2000" b="1" i="0">
+                <a:solidFill>
+                  <a:srgbClr val="4B4F52"/>
+                </a:solidFill>
+                <a:latin typeface="Verdana"/>
+              </a:rPr>
+              <a:t>ses</a:t>
+            </a:r>
+            <a:r>
+              <a:rPr sz="2000" b="0" i="0">
+                <a:solidFill>
+                  <a:srgbClr val="4B4F52"/>
+                </a:solidFill>
+                <a:latin typeface="Verdana"/>
+              </a:rPr>
+              <a:t>. Au féminin, la fin du mot change souvent — et ça s'entend.</a:t>
             </a:r>
           </a:p>
         </p:txBody>
